--- a/site/clases/parte-1-machine-learning-clasico/065-precision-recall-tradeoff/clase-065-precision-recall-tradeoff-presentacion.pptx
+++ b/site/clases/parte-1-machine-learning-clasico/065-precision-recall-tradeoff/clase-065-precision-recall-tradeoff-presentacion.pptx
@@ -3272,7 +3272,7 @@
                 </a:solidFill>
                 <a:latin typeface="Segoe UI"/>
               </a:rPr>
-              <a:t>Parte: 1 — Machine Learning Clásico · Fuente: Géron, cap. 3.  Duración estimada: 50 min.</a:t>
+              <a:t>Parte: 1 — Machine Learning Clásico · Fuente: Géron, cap. 3.  Duración estimada: 50 min. · Nivel: Intermedio</a:t>
             </a:r>
           </a:p>
         </p:txBody>
@@ -3581,7 +3581,7 @@
                 </a:solidFill>
                 <a:latin typeface="Segoe UI"/>
               </a:rPr>
-              <a:t>Parte: 1 — Machine Learning Clásico · Fuente: Géron, cap. 3.  Duración estimada: 50 min.</a:t>
+              <a:t>Parte: 1 — Machine Learning Clásico · Fuente: Géron, cap. 3.  Duración estimada: 50 min. · Nivel: Intermedio</a:t>
             </a:r>
           </a:p>
         </p:txBody>
@@ -4933,7 +4933,7 @@
                 </a:solidFill>
                 <a:latin typeface="Segoe UI"/>
               </a:rPr>
-              <a:t>Primer bloque ejecutable del notebook.</a:t>
+              <a:t>No se puede maximizar precision y recall a la vez: mover el umbral de decisión sube uno y baja el otro. Usamos decision_function + precision_recall_curve para elegir el umbral según el costo del negocio, no según el default 0. Requiere: numpy, scikit-learn, matplotlib.</a:t>
             </a:r>
           </a:p>
         </p:txBody>
@@ -5020,7 +5020,273 @@
                 </a:solidFill>
                 <a:latin typeface="Courier New"/>
               </a:rPr>
-              <a:t># Imports y configuración inicial</a:t>
+              <a:t>import numpy as np</a:t>
+            </a:r>
+          </a:p>
+          <a:p>
+            <a:pPr>
+              <a:defRPr sz="1200" b="0">
+                <a:solidFill>
+                  <a:srgbClr val="F8FAFC"/>
+                </a:solidFill>
+                <a:latin typeface="Courier New"/>
+              </a:defRPr>
+            </a:pPr>
+            <a:r>
+              <a:rPr sz="1200" b="0">
+                <a:solidFill>
+                  <a:srgbClr val="F8FAFC"/>
+                </a:solidFill>
+                <a:latin typeface="Courier New"/>
+              </a:rPr>
+              <a:t>import matplotlib.pyplot as plt</a:t>
+            </a:r>
+          </a:p>
+          <a:p>
+            <a:pPr>
+              <a:defRPr sz="1200" b="0">
+                <a:solidFill>
+                  <a:srgbClr val="F8FAFC"/>
+                </a:solidFill>
+                <a:latin typeface="Courier New"/>
+              </a:defRPr>
+            </a:pPr>
+            <a:r>
+              <a:rPr sz="1200" b="0">
+                <a:solidFill>
+                  <a:srgbClr val="F8FAFC"/>
+                </a:solidFill>
+                <a:latin typeface="Courier New"/>
+              </a:rPr>
+              <a:t>from sklearn.datasets import load_digits</a:t>
+            </a:r>
+          </a:p>
+          <a:p>
+            <a:pPr>
+              <a:defRPr sz="1200" b="0">
+                <a:solidFill>
+                  <a:srgbClr val="F8FAFC"/>
+                </a:solidFill>
+                <a:latin typeface="Courier New"/>
+              </a:defRPr>
+            </a:pPr>
+            <a:r>
+              <a:rPr sz="1200" b="0">
+                <a:solidFill>
+                  <a:srgbClr val="F8FAFC"/>
+                </a:solidFill>
+                <a:latin typeface="Courier New"/>
+              </a:rPr>
+              <a:t>from sklearn.linear_model import SGDClassifier</a:t>
+            </a:r>
+          </a:p>
+          <a:p>
+            <a:pPr>
+              <a:defRPr sz="1200" b="0">
+                <a:solidFill>
+                  <a:srgbClr val="F8FAFC"/>
+                </a:solidFill>
+                <a:latin typeface="Courier New"/>
+              </a:defRPr>
+            </a:pPr>
+            <a:r>
+              <a:rPr sz="1200" b="0">
+                <a:solidFill>
+                  <a:srgbClr val="F8FAFC"/>
+                </a:solidFill>
+                <a:latin typeface="Courier New"/>
+              </a:rPr>
+              <a:t>from sklearn.model_selection import train_test_split, cross_val_predict</a:t>
+            </a:r>
+          </a:p>
+          <a:p>
+            <a:pPr>
+              <a:defRPr sz="1200" b="0">
+                <a:solidFill>
+                  <a:srgbClr val="F8FAFC"/>
+                </a:solidFill>
+                <a:latin typeface="Courier New"/>
+              </a:defRPr>
+            </a:pPr>
+            <a:r>
+              <a:rPr sz="1200" b="0">
+                <a:solidFill>
+                  <a:srgbClr val="F8FAFC"/>
+                </a:solidFill>
+                <a:latin typeface="Courier New"/>
+              </a:rPr>
+              <a:t>from sklearn.metrics import (precision_recall_curve, precision_score,</a:t>
+            </a:r>
+          </a:p>
+          <a:p>
+            <a:pPr>
+              <a:defRPr sz="1200" b="0">
+                <a:solidFill>
+                  <a:srgbClr val="F8FAFC"/>
+                </a:solidFill>
+                <a:latin typeface="Courier New"/>
+              </a:defRPr>
+            </a:pPr>
+            <a:r>
+              <a:rPr sz="1200" b="0">
+                <a:solidFill>
+                  <a:srgbClr val="F8FAFC"/>
+                </a:solidFill>
+                <a:latin typeface="Courier New"/>
+              </a:rPr>
+              <a:t>                             recall_score, average_precision_score)</a:t>
+            </a:r>
+          </a:p>
+          <a:p>
+            <a:pPr>
+              <a:defRPr sz="1200" b="0">
+                <a:solidFill>
+                  <a:srgbClr val="F8FAFC"/>
+                </a:solidFill>
+                <a:latin typeface="Courier New"/>
+              </a:defRPr>
+            </a:pPr>
+            <a:r>
+              <a:rPr sz="1200" b="0">
+                <a:solidFill>
+                  <a:srgbClr val="F8FAFC"/>
+                </a:solidFill>
+                <a:latin typeface="Courier New"/>
+              </a:rPr>
+              <a:t> </a:t>
+            </a:r>
+          </a:p>
+          <a:p>
+            <a:pPr>
+              <a:defRPr sz="1200" b="0">
+                <a:solidFill>
+                  <a:srgbClr val="F8FAFC"/>
+                </a:solidFill>
+                <a:latin typeface="Courier New"/>
+              </a:defRPr>
+            </a:pPr>
+            <a:r>
+              <a:rPr sz="1200" b="0">
+                <a:solidFill>
+                  <a:srgbClr val="F8FAFC"/>
+                </a:solidFill>
+                <a:latin typeface="Courier New"/>
+              </a:rPr>
+              <a:t>np.random.seed(42)</a:t>
+            </a:r>
+          </a:p>
+          <a:p>
+            <a:pPr>
+              <a:defRPr sz="1200" b="0">
+                <a:solidFill>
+                  <a:srgbClr val="F8FAFC"/>
+                </a:solidFill>
+                <a:latin typeface="Courier New"/>
+              </a:defRPr>
+            </a:pPr>
+            <a:r>
+              <a:rPr sz="1200" b="0">
+                <a:solidFill>
+                  <a:srgbClr val="F8FAFC"/>
+                </a:solidFill>
+                <a:latin typeface="Courier New"/>
+              </a:rPr>
+              <a:t> </a:t>
+            </a:r>
+          </a:p>
+          <a:p>
+            <a:pPr>
+              <a:defRPr sz="1200" b="0">
+                <a:solidFill>
+                  <a:srgbClr val="F8FAFC"/>
+                </a:solidFill>
+                <a:latin typeface="Courier New"/>
+              </a:defRPr>
+            </a:pPr>
+            <a:r>
+              <a:rPr sz="1200" b="0">
+                <a:solidFill>
+                  <a:srgbClr val="F8FAFC"/>
+                </a:solidFill>
+                <a:latin typeface="Courier New"/>
+              </a:rPr>
+              <a:t>digits = load_digits()</a:t>
+            </a:r>
+          </a:p>
+          <a:p>
+            <a:pPr>
+              <a:defRPr sz="1200" b="0">
+                <a:solidFill>
+                  <a:srgbClr val="F8FAFC"/>
+                </a:solidFill>
+                <a:latin typeface="Courier New"/>
+              </a:defRPr>
+            </a:pPr>
+            <a:r>
+              <a:rPr sz="1200" b="0">
+                <a:solidFill>
+                  <a:srgbClr val="F8FAFC"/>
+                </a:solidFill>
+                <a:latin typeface="Courier New"/>
+              </a:rPr>
+              <a:t>X, y = digits.data, digits.target</a:t>
+            </a:r>
+          </a:p>
+          <a:p>
+            <a:pPr>
+              <a:defRPr sz="1200" b="0">
+                <a:solidFill>
+                  <a:srgbClr val="F8FAFC"/>
+                </a:solidFill>
+                <a:latin typeface="Courier New"/>
+              </a:defRPr>
+            </a:pPr>
+            <a:r>
+              <a:rPr sz="1200" b="0">
+                <a:solidFill>
+                  <a:srgbClr val="F8FAFC"/>
+                </a:solidFill>
+                <a:latin typeface="Courier New"/>
+              </a:rPr>
+              <a:t>Xtr, Xte, ytr, yte = train_test_split(X, y, test_size=0.3, stratify=y, random_state=42)</a:t>
+            </a:r>
+          </a:p>
+          <a:p>
+            <a:pPr>
+              <a:defRPr sz="1200" b="0">
+                <a:solidFill>
+                  <a:srgbClr val="F8FAFC"/>
+                </a:solidFill>
+                <a:latin typeface="Courier New"/>
+              </a:defRPr>
+            </a:pPr>
+            <a:r>
+              <a:rPr sz="1200" b="0">
+                <a:solidFill>
+                  <a:srgbClr val="F8FAFC"/>
+                </a:solidFill>
+                <a:latin typeface="Courier New"/>
+              </a:rPr>
+              <a:t>ytr5 = (ytr == 5)</a:t>
+            </a:r>
+          </a:p>
+          <a:p>
+            <a:pPr>
+              <a:defRPr sz="1200" b="0">
+                <a:solidFill>
+                  <a:srgbClr val="F8FAFC"/>
+                </a:solidFill>
+                <a:latin typeface="Courier New"/>
+              </a:defRPr>
+            </a:pPr>
+            <a:r>
+              <a:rPr sz="1200" b="0">
+                <a:solidFill>
+                  <a:srgbClr val="F8FAFC"/>
+                </a:solidFill>
+                <a:latin typeface="Courier New"/>
+              </a:rPr>
+              <a:t>print('positivos (5) en train:', int(ytr5.sum()), '/', len(ytr5))</a:t>
             </a:r>
           </a:p>
         </p:txBody>
